--- a/instructor/slides/pptx/lectures/S14-B-itsm-cdc-fx.pptx
+++ b/instructor/slides/pptx/lectures/S14-B-itsm-cdc-fx.pptx
@@ -3668,8 +3668,8 @@
         </p:nvSpPr>
         <p:spPr>
           <a:xfrm>
-            <a:off x="640080" y="1920240"/>
-            <a:ext cx="10972800" cy="1463040"/>
+            <a:off x="640080" y="1828800"/>
+            <a:ext cx="6675120" cy="1645920"/>
           </a:xfrm>
           <a:prstGeom prst="rect">
             <a:avLst/>
@@ -3683,7 +3683,7 @@
           <a:lstStyle/>
           <a:p>
             <a:r>
-              <a:rPr sz="4400" b="1">
+              <a:rPr sz="4000" b="1">
                 <a:solidFill>
                   <a:srgbClr val="FFFFFF"/>
                 </a:solidFill>
@@ -3702,8 +3702,8 @@
         </p:nvSpPr>
         <p:spPr>
           <a:xfrm>
-            <a:off x="640080" y="3657600"/>
-            <a:ext cx="10789920" cy="1097280"/>
+            <a:off x="640080" y="3794760"/>
+            <a:ext cx="6675120" cy="1097280"/>
           </a:xfrm>
           <a:prstGeom prst="rect">
             <a:avLst/>
@@ -3717,7 +3717,7 @@
           <a:lstStyle/>
           <a:p>
             <a:r>
-              <a:rPr sz="2000" b="0">
+              <a:rPr sz="1800" b="0">
                 <a:solidFill>
                   <a:srgbClr val="B7CBDE"/>
                 </a:solidFill>
@@ -3736,8 +3736,8 @@
         </p:nvSpPr>
         <p:spPr>
           <a:xfrm>
-            <a:off x="640080" y="5029200"/>
-            <a:ext cx="10972800" cy="457200"/>
+            <a:off x="640080" y="5120640"/>
+            <a:ext cx="6766560" cy="457200"/>
           </a:xfrm>
           <a:prstGeom prst="rect">
             <a:avLst/>
@@ -3751,7 +3751,7 @@
           <a:lstStyle/>
           <a:p>
             <a:r>
-              <a:rPr sz="1600" b="0">
+              <a:rPr sz="1500" b="0">
                 <a:solidFill>
                   <a:srgbClr val="3EC6FF"/>
                 </a:solidFill>
@@ -3762,6 +3762,30 @@
           </a:p>
         </p:txBody>
       </p:sp>
+      <p:pic>
+        <p:nvPicPr>
+          <p:cNvPr id="7" name="Picture 6" descr="dw-mapping.jpg"/>
+          <p:cNvPicPr>
+            <a:picLocks noChangeAspect="1"/>
+          </p:cNvPicPr>
+          <p:nvPr/>
+        </p:nvPicPr>
+        <p:blipFill>
+          <a:blip r:embed="rId2"/>
+          <a:stretch>
+            <a:fillRect/>
+          </a:stretch>
+        </p:blipFill>
+        <p:spPr>
+          <a:xfrm>
+            <a:off x="7452360" y="1325880"/>
+            <a:ext cx="4160520" cy="4160520"/>
+          </a:xfrm>
+          <a:prstGeom prst="rect">
+            <a:avLst/>
+          </a:prstGeom>
+        </p:spPr>
+      </p:pic>
     </p:spTree>
   </p:cSld>
   <p:clrMapOvr>
@@ -3865,8 +3889,8 @@
         </p:nvSpPr>
         <p:spPr>
           <a:xfrm>
-            <a:off x="640080" y="685800"/>
-            <a:ext cx="10972800" cy="1463040"/>
+            <a:off x="640080" y="658368"/>
+            <a:ext cx="7863840" cy="1645920"/>
           </a:xfrm>
           <a:prstGeom prst="rect">
             <a:avLst/>
@@ -3880,7 +3904,7 @@
           <a:lstStyle/>
           <a:p>
             <a:r>
-              <a:rPr sz="3200" b="1">
+              <a:rPr sz="3000" b="1">
                 <a:solidFill>
                   <a:srgbClr val="FFFFFF"/>
                 </a:solidFill>
@@ -3899,8 +3923,8 @@
         </p:nvSpPr>
         <p:spPr>
           <a:xfrm>
-            <a:off x="777240" y="2286000"/>
-            <a:ext cx="10607040" cy="4754880"/>
+            <a:off x="777240" y="2331720"/>
+            <a:ext cx="7498079" cy="4754880"/>
           </a:xfrm>
           <a:prstGeom prst="rect">
             <a:avLst/>
@@ -3919,7 +3943,7 @@
               </a:spcAft>
             </a:pPr>
             <a:r>
-              <a:rPr sz="2400" b="0">
+              <a:rPr sz="2200" b="0">
                 <a:solidFill>
                   <a:srgbClr val="FFFFFF"/>
                 </a:solidFill>
@@ -3935,7 +3959,7 @@
               </a:spcAft>
             </a:pPr>
             <a:r>
-              <a:rPr sz="2400" b="0">
+              <a:rPr sz="2200" b="0">
                 <a:solidFill>
                   <a:srgbClr val="FFFFFF"/>
                 </a:solidFill>
@@ -3951,7 +3975,7 @@
               </a:spcAft>
             </a:pPr>
             <a:r>
-              <a:rPr sz="2400" b="0">
+              <a:rPr sz="2200" b="0">
                 <a:solidFill>
                   <a:srgbClr val="FFFFFF"/>
                 </a:solidFill>
@@ -3962,6 +3986,30 @@
           </a:p>
         </p:txBody>
       </p:sp>
+      <p:pic>
+        <p:nvPicPr>
+          <p:cNvPr id="6" name="Picture 5" descr="dw-mapping.jpg"/>
+          <p:cNvPicPr>
+            <a:picLocks noChangeAspect="1"/>
+          </p:cNvPicPr>
+          <p:nvPr/>
+        </p:nvPicPr>
+        <p:blipFill>
+          <a:blip r:embed="rId2"/>
+          <a:stretch>
+            <a:fillRect/>
+          </a:stretch>
+        </p:blipFill>
+        <p:spPr>
+          <a:xfrm>
+            <a:off x="8732520" y="2057400"/>
+            <a:ext cx="2880360" cy="2880360"/>
+          </a:xfrm>
+          <a:prstGeom prst="rect">
+            <a:avLst/>
+          </a:prstGeom>
+        </p:spPr>
+      </p:pic>
     </p:spTree>
   </p:cSld>
   <p:clrMapOvr>
@@ -4065,8 +4113,8 @@
         </p:nvSpPr>
         <p:spPr>
           <a:xfrm>
-            <a:off x="640080" y="685800"/>
-            <a:ext cx="10972800" cy="1463040"/>
+            <a:off x="640080" y="658368"/>
+            <a:ext cx="7863840" cy="1645920"/>
           </a:xfrm>
           <a:prstGeom prst="rect">
             <a:avLst/>
@@ -4080,7 +4128,7 @@
           <a:lstStyle/>
           <a:p>
             <a:r>
-              <a:rPr sz="3200" b="1">
+              <a:rPr sz="3000" b="1">
                 <a:solidFill>
                   <a:srgbClr val="FFFFFF"/>
                 </a:solidFill>
@@ -4099,8 +4147,8 @@
         </p:nvSpPr>
         <p:spPr>
           <a:xfrm>
-            <a:off x="777240" y="2286000"/>
-            <a:ext cx="10607040" cy="4754880"/>
+            <a:off x="777240" y="2331720"/>
+            <a:ext cx="7498079" cy="4754880"/>
           </a:xfrm>
           <a:prstGeom prst="rect">
             <a:avLst/>
@@ -4119,7 +4167,7 @@
               </a:spcAft>
             </a:pPr>
             <a:r>
-              <a:rPr sz="2400" b="0">
+              <a:rPr sz="2200" b="0">
                 <a:solidFill>
                   <a:srgbClr val="FFFFFF"/>
                 </a:solidFill>
@@ -4135,7 +4183,7 @@
               </a:spcAft>
             </a:pPr>
             <a:r>
-              <a:rPr sz="2400" b="0">
+              <a:rPr sz="2200" b="0">
                 <a:solidFill>
                   <a:srgbClr val="FFFFFF"/>
                 </a:solidFill>
@@ -4151,7 +4199,7 @@
               </a:spcAft>
             </a:pPr>
             <a:r>
-              <a:rPr sz="2400" b="0">
+              <a:rPr sz="2200" b="0">
                 <a:solidFill>
                   <a:srgbClr val="FFFFFF"/>
                 </a:solidFill>
@@ -4167,7 +4215,7 @@
               </a:spcAft>
             </a:pPr>
             <a:r>
-              <a:rPr sz="2400" b="0">
+              <a:rPr sz="2200" b="0">
                 <a:solidFill>
                   <a:srgbClr val="FFFFFF"/>
                 </a:solidFill>
@@ -4178,6 +4226,30 @@
           </a:p>
         </p:txBody>
       </p:sp>
+      <p:pic>
+        <p:nvPicPr>
+          <p:cNvPr id="6" name="Picture 5" descr="dw-mapping.jpg"/>
+          <p:cNvPicPr>
+            <a:picLocks noChangeAspect="1"/>
+          </p:cNvPicPr>
+          <p:nvPr/>
+        </p:nvPicPr>
+        <p:blipFill>
+          <a:blip r:embed="rId2"/>
+          <a:stretch>
+            <a:fillRect/>
+          </a:stretch>
+        </p:blipFill>
+        <p:spPr>
+          <a:xfrm>
+            <a:off x="8732520" y="2057400"/>
+            <a:ext cx="2880360" cy="2880360"/>
+          </a:xfrm>
+          <a:prstGeom prst="rect">
+            <a:avLst/>
+          </a:prstGeom>
+        </p:spPr>
+      </p:pic>
     </p:spTree>
   </p:cSld>
   <p:clrMapOvr>
@@ -4281,8 +4353,8 @@
         </p:nvSpPr>
         <p:spPr>
           <a:xfrm>
-            <a:off x="640080" y="685800"/>
-            <a:ext cx="10972800" cy="1463040"/>
+            <a:off x="640080" y="658368"/>
+            <a:ext cx="7863840" cy="1645920"/>
           </a:xfrm>
           <a:prstGeom prst="rect">
             <a:avLst/>
@@ -4296,7 +4368,7 @@
           <a:lstStyle/>
           <a:p>
             <a:r>
-              <a:rPr sz="3200" b="1">
+              <a:rPr sz="3000" b="1">
                 <a:solidFill>
                   <a:srgbClr val="FFFFFF"/>
                 </a:solidFill>
@@ -4315,8 +4387,8 @@
         </p:nvSpPr>
         <p:spPr>
           <a:xfrm>
-            <a:off x="777240" y="2286000"/>
-            <a:ext cx="10607040" cy="4754880"/>
+            <a:off x="777240" y="2331720"/>
+            <a:ext cx="7498079" cy="4754880"/>
           </a:xfrm>
           <a:prstGeom prst="rect">
             <a:avLst/>
@@ -4335,7 +4407,7 @@
               </a:spcAft>
             </a:pPr>
             <a:r>
-              <a:rPr sz="2400" b="0">
+              <a:rPr sz="2200" b="0">
                 <a:solidFill>
                   <a:srgbClr val="FFFFFF"/>
                 </a:solidFill>
@@ -4351,7 +4423,7 @@
               </a:spcAft>
             </a:pPr>
             <a:r>
-              <a:rPr sz="2400" b="0">
+              <a:rPr sz="2200" b="0">
                 <a:solidFill>
                   <a:srgbClr val="FFFFFF"/>
                 </a:solidFill>
@@ -4367,7 +4439,7 @@
               </a:spcAft>
             </a:pPr>
             <a:r>
-              <a:rPr sz="2400" b="0">
+              <a:rPr sz="2200" b="0">
                 <a:solidFill>
                   <a:srgbClr val="FFFFFF"/>
                 </a:solidFill>
@@ -4378,6 +4450,30 @@
           </a:p>
         </p:txBody>
       </p:sp>
+      <p:pic>
+        <p:nvPicPr>
+          <p:cNvPr id="6" name="Picture 5" descr="dw-mapping.jpg"/>
+          <p:cNvPicPr>
+            <a:picLocks noChangeAspect="1"/>
+          </p:cNvPicPr>
+          <p:nvPr/>
+        </p:nvPicPr>
+        <p:blipFill>
+          <a:blip r:embed="rId2"/>
+          <a:stretch>
+            <a:fillRect/>
+          </a:stretch>
+        </p:blipFill>
+        <p:spPr>
+          <a:xfrm>
+            <a:off x="8732520" y="2057400"/>
+            <a:ext cx="2880360" cy="2880360"/>
+          </a:xfrm>
+          <a:prstGeom prst="rect">
+            <a:avLst/>
+          </a:prstGeom>
+        </p:spPr>
+      </p:pic>
     </p:spTree>
   </p:cSld>
   <p:clrMapOvr>
@@ -4481,8 +4577,8 @@
         </p:nvSpPr>
         <p:spPr>
           <a:xfrm>
-            <a:off x="640080" y="685800"/>
-            <a:ext cx="10972800" cy="1463040"/>
+            <a:off x="640080" y="658368"/>
+            <a:ext cx="7863840" cy="1645920"/>
           </a:xfrm>
           <a:prstGeom prst="rect">
             <a:avLst/>
@@ -4496,7 +4592,7 @@
           <a:lstStyle/>
           <a:p>
             <a:r>
-              <a:rPr sz="3200" b="1">
+              <a:rPr sz="3000" b="1">
                 <a:solidFill>
                   <a:srgbClr val="FFFFFF"/>
                 </a:solidFill>
@@ -4515,8 +4611,8 @@
         </p:nvSpPr>
         <p:spPr>
           <a:xfrm>
-            <a:off x="777240" y="2286000"/>
-            <a:ext cx="10607040" cy="4754880"/>
+            <a:off x="777240" y="2331720"/>
+            <a:ext cx="7498079" cy="4754880"/>
           </a:xfrm>
           <a:prstGeom prst="rect">
             <a:avLst/>
@@ -4535,7 +4631,7 @@
               </a:spcAft>
             </a:pPr>
             <a:r>
-              <a:rPr sz="2400" b="0">
+              <a:rPr sz="2200" b="0">
                 <a:solidFill>
                   <a:srgbClr val="FFB020"/>
                 </a:solidFill>
@@ -4551,7 +4647,7 @@
               </a:spcAft>
             </a:pPr>
             <a:r>
-              <a:rPr sz="2400" b="0">
+              <a:rPr sz="2200" b="0">
                 <a:solidFill>
                   <a:srgbClr val="FFB020"/>
                 </a:solidFill>
@@ -4567,7 +4663,7 @@
               </a:spcAft>
             </a:pPr>
             <a:r>
-              <a:rPr sz="2400" b="0">
+              <a:rPr sz="2200" b="0">
                 <a:solidFill>
                   <a:srgbClr val="FFB020"/>
                 </a:solidFill>
@@ -4583,7 +4679,7 @@
               </a:spcAft>
             </a:pPr>
             <a:r>
-              <a:rPr sz="2400" b="0">
+              <a:rPr sz="2200" b="0">
                 <a:solidFill>
                   <a:srgbClr val="FFB020"/>
                 </a:solidFill>
@@ -4594,6 +4690,30 @@
           </a:p>
         </p:txBody>
       </p:sp>
+      <p:pic>
+        <p:nvPicPr>
+          <p:cNvPr id="6" name="Picture 5" descr="dw-pause.jpg"/>
+          <p:cNvPicPr>
+            <a:picLocks noChangeAspect="1"/>
+          </p:cNvPicPr>
+          <p:nvPr/>
+        </p:nvPicPr>
+        <p:blipFill>
+          <a:blip r:embed="rId2"/>
+          <a:stretch>
+            <a:fillRect/>
+          </a:stretch>
+        </p:blipFill>
+        <p:spPr>
+          <a:xfrm>
+            <a:off x="8366760" y="1874519"/>
+            <a:ext cx="3246120" cy="3246120"/>
+          </a:xfrm>
+          <a:prstGeom prst="rect">
+            <a:avLst/>
+          </a:prstGeom>
+        </p:spPr>
+      </p:pic>
     </p:spTree>
   </p:cSld>
   <p:clrMapOvr>
@@ -4697,8 +4817,8 @@
         </p:nvSpPr>
         <p:spPr>
           <a:xfrm>
-            <a:off x="640080" y="685800"/>
-            <a:ext cx="10972800" cy="1463040"/>
+            <a:off x="640080" y="658368"/>
+            <a:ext cx="7863840" cy="1645920"/>
           </a:xfrm>
           <a:prstGeom prst="rect">
             <a:avLst/>
@@ -4712,7 +4832,7 @@
           <a:lstStyle/>
           <a:p>
             <a:r>
-              <a:rPr sz="3200" b="1">
+              <a:rPr sz="3000" b="1">
                 <a:solidFill>
                   <a:srgbClr val="FFFFFF"/>
                 </a:solidFill>
@@ -4731,8 +4851,8 @@
         </p:nvSpPr>
         <p:spPr>
           <a:xfrm>
-            <a:off x="777240" y="2286000"/>
-            <a:ext cx="10607040" cy="4754880"/>
+            <a:off x="777240" y="2331720"/>
+            <a:ext cx="7498079" cy="4754880"/>
           </a:xfrm>
           <a:prstGeom prst="rect">
             <a:avLst/>
@@ -4751,7 +4871,7 @@
               </a:spcAft>
             </a:pPr>
             <a:r>
-              <a:rPr sz="2400" b="0">
+              <a:rPr sz="2200" b="0">
                 <a:solidFill>
                   <a:srgbClr val="FFFFFF"/>
                 </a:solidFill>
@@ -4767,7 +4887,7 @@
               </a:spcAft>
             </a:pPr>
             <a:r>
-              <a:rPr sz="2400" b="0">
+              <a:rPr sz="2200" b="0">
                 <a:solidFill>
                   <a:srgbClr val="FFFFFF"/>
                 </a:solidFill>
@@ -4778,6 +4898,30 @@
           </a:p>
         </p:txBody>
       </p:sp>
+      <p:pic>
+        <p:nvPicPr>
+          <p:cNvPr id="6" name="Picture 5" descr="dw-mapping.jpg"/>
+          <p:cNvPicPr>
+            <a:picLocks noChangeAspect="1"/>
+          </p:cNvPicPr>
+          <p:nvPr/>
+        </p:nvPicPr>
+        <p:blipFill>
+          <a:blip r:embed="rId2"/>
+          <a:stretch>
+            <a:fillRect/>
+          </a:stretch>
+        </p:blipFill>
+        <p:spPr>
+          <a:xfrm>
+            <a:off x="8732520" y="2057400"/>
+            <a:ext cx="2880360" cy="2880360"/>
+          </a:xfrm>
+          <a:prstGeom prst="rect">
+            <a:avLst/>
+          </a:prstGeom>
+        </p:spPr>
+      </p:pic>
     </p:spTree>
   </p:cSld>
   <p:clrMapOvr>
